--- a/lessons/lesson-13/slides.pptx
+++ b/lessons/lesson-13/slides.pptx
@@ -2,31 +2,31 @@
 <file path=ppt/presentation.xml><?xml version="1.0" encoding="utf-8"?>
 <p:presentation xmlns:p="http://schemas.openxmlformats.org/presentationml/2006/main">
   <p:sldMasterIdLst>
-    <p:sldMasterId xmlns:r="http://schemas.openxmlformats.org/officeDocument/2006/relationships" id="2147483648" r:id="Rfcb9ed806f474512"/>
+    <p:sldMasterId xmlns:r="http://schemas.openxmlformats.org/officeDocument/2006/relationships" id="2147483648" r:id="Rbe677b0ad5db4352"/>
   </p:sldMasterIdLst>
   <p:notesMasterIdLst>
-    <p:notesMasterId xmlns:r="http://schemas.openxmlformats.org/officeDocument/2006/relationships" r:id="R72c406ffd27b4416"/>
+    <p:notesMasterId xmlns:r="http://schemas.openxmlformats.org/officeDocument/2006/relationships" r:id="Rc3a359a968a24039"/>
   </p:notesMasterIdLst>
   <p:sldIdLst>
-    <p:sldId xmlns:r="http://schemas.openxmlformats.org/officeDocument/2006/relationships" id="256" r:id="Ra648a424b70c4e74"/>
-    <p:sldId xmlns:r="http://schemas.openxmlformats.org/officeDocument/2006/relationships" id="257" r:id="R5de3fcfe78164412"/>
-    <p:sldId xmlns:r="http://schemas.openxmlformats.org/officeDocument/2006/relationships" id="258" r:id="R592b830142bc4400"/>
-    <p:sldId xmlns:r="http://schemas.openxmlformats.org/officeDocument/2006/relationships" id="259" r:id="R7a270d1413434e53"/>
-    <p:sldId xmlns:r="http://schemas.openxmlformats.org/officeDocument/2006/relationships" id="260" r:id="Rfeefbfca3f2d433e"/>
-    <p:sldId xmlns:r="http://schemas.openxmlformats.org/officeDocument/2006/relationships" id="261" r:id="R4b00fcba9ce74640"/>
-    <p:sldId xmlns:r="http://schemas.openxmlformats.org/officeDocument/2006/relationships" id="262" r:id="Rb092fc27c9a04f55"/>
-    <p:sldId xmlns:r="http://schemas.openxmlformats.org/officeDocument/2006/relationships" id="263" r:id="R156428e28f7d486b"/>
-    <p:sldId xmlns:r="http://schemas.openxmlformats.org/officeDocument/2006/relationships" id="264" r:id="R407164eba24743d1"/>
-    <p:sldId xmlns:r="http://schemas.openxmlformats.org/officeDocument/2006/relationships" id="265" r:id="R630554fa191543bc"/>
-    <p:sldId xmlns:r="http://schemas.openxmlformats.org/officeDocument/2006/relationships" id="266" r:id="R1ac948c25f5a4d22"/>
-    <p:sldId xmlns:r="http://schemas.openxmlformats.org/officeDocument/2006/relationships" id="267" r:id="R388e6e264655461c"/>
-    <p:sldId xmlns:r="http://schemas.openxmlformats.org/officeDocument/2006/relationships" id="268" r:id="R496efee0ec23419a"/>
-    <p:sldId xmlns:r="http://schemas.openxmlformats.org/officeDocument/2006/relationships" id="269" r:id="R63408f41f47340d1"/>
-    <p:sldId xmlns:r="http://schemas.openxmlformats.org/officeDocument/2006/relationships" id="270" r:id="Rf81e5a3023f74726"/>
-    <p:sldId xmlns:r="http://schemas.openxmlformats.org/officeDocument/2006/relationships" id="271" r:id="R3b9f8766793d4922"/>
-    <p:sldId xmlns:r="http://schemas.openxmlformats.org/officeDocument/2006/relationships" id="272" r:id="Rb3cba6a888b64d83"/>
-    <p:sldId xmlns:r="http://schemas.openxmlformats.org/officeDocument/2006/relationships" id="273" r:id="Rc40486446cd14f53"/>
-    <p:sldId xmlns:r="http://schemas.openxmlformats.org/officeDocument/2006/relationships" id="274" r:id="Re1e5228b689e4815"/>
+    <p:sldId xmlns:r="http://schemas.openxmlformats.org/officeDocument/2006/relationships" id="256" r:id="Rf29bf922df4b4923"/>
+    <p:sldId xmlns:r="http://schemas.openxmlformats.org/officeDocument/2006/relationships" id="257" r:id="R56e0cec97347451b"/>
+    <p:sldId xmlns:r="http://schemas.openxmlformats.org/officeDocument/2006/relationships" id="258" r:id="R4a9893815ce44206"/>
+    <p:sldId xmlns:r="http://schemas.openxmlformats.org/officeDocument/2006/relationships" id="259" r:id="R1613ac3c5d174369"/>
+    <p:sldId xmlns:r="http://schemas.openxmlformats.org/officeDocument/2006/relationships" id="260" r:id="Re46d0b4b6ff742a6"/>
+    <p:sldId xmlns:r="http://schemas.openxmlformats.org/officeDocument/2006/relationships" id="261" r:id="R02b538e92230493a"/>
+    <p:sldId xmlns:r="http://schemas.openxmlformats.org/officeDocument/2006/relationships" id="262" r:id="Rd621c7d58c234d31"/>
+    <p:sldId xmlns:r="http://schemas.openxmlformats.org/officeDocument/2006/relationships" id="263" r:id="R7646ab9998ef4203"/>
+    <p:sldId xmlns:r="http://schemas.openxmlformats.org/officeDocument/2006/relationships" id="264" r:id="R6a32214c0ba64889"/>
+    <p:sldId xmlns:r="http://schemas.openxmlformats.org/officeDocument/2006/relationships" id="265" r:id="R14b223e0a53b411f"/>
+    <p:sldId xmlns:r="http://schemas.openxmlformats.org/officeDocument/2006/relationships" id="266" r:id="R5637f372411f4e37"/>
+    <p:sldId xmlns:r="http://schemas.openxmlformats.org/officeDocument/2006/relationships" id="267" r:id="Ra953507045c2449a"/>
+    <p:sldId xmlns:r="http://schemas.openxmlformats.org/officeDocument/2006/relationships" id="268" r:id="Rf661a03a3e7942a7"/>
+    <p:sldId xmlns:r="http://schemas.openxmlformats.org/officeDocument/2006/relationships" id="269" r:id="Ra1d9f1319cfb4430"/>
+    <p:sldId xmlns:r="http://schemas.openxmlformats.org/officeDocument/2006/relationships" id="270" r:id="R8fc5e3ad3b274b77"/>
+    <p:sldId xmlns:r="http://schemas.openxmlformats.org/officeDocument/2006/relationships" id="271" r:id="R8480f923d85d440b"/>
+    <p:sldId xmlns:r="http://schemas.openxmlformats.org/officeDocument/2006/relationships" id="272" r:id="R2e0fc9ab4feb4c4a"/>
+    <p:sldId xmlns:r="http://schemas.openxmlformats.org/officeDocument/2006/relationships" id="273" r:id="R91dbd9d91af64d33"/>
+    <p:sldId xmlns:r="http://schemas.openxmlformats.org/officeDocument/2006/relationships" id="274" r:id="R7d68660c4e024afe"/>
   </p:sldIdLst>
   <p:sldSz cx="12192000" cy="6858000"/>
   <p:notesSz cx="6858000" cy="9144000"/>
@@ -506,7 +506,7 @@
           <a:lstStyle xmlns:a="http://schemas.openxmlformats.org/drawingml/2006/main"/>
           <a:p xmlns:a="http://schemas.openxmlformats.org/drawingml/2006/main">
             <a:r>
-              <a:t>独立证据是来源、测量、重复实验、对照、消融或分析路径的实质差异，不是两个网页。H1 只有中等支持，A2 仍不能判断，因此都不能写成 stable。</a:t>
+              <a:t>课程虚构教学案例：H1、A2 与 exp-001..010 为课堂构造标识，非真实实验。独立证据是来源、测量、重复实验、对照、消融或分析路径的实质差异，不是两个网页。</a:t>
             </a:r>
           </a:p>
           <a:p xmlns:a="http://schemas.openxmlformats.org/drawingml/2006/main">
@@ -517,6 +517,11 @@
           <a:p xmlns:a="http://schemas.openxmlformats.org/drawingml/2006/main">
             <a:r>
               <a:t>[Sources]</a:t>
+            </a:r>
+          </a:p>
+          <a:p xmlns:a="http://schemas.openxmlformats.org/drawingml/2006/main">
+            <a:r>
+              <a:t>- Teaching artifact; hypotheses and experiment identifiers are fictional.</a:t>
             </a:r>
           </a:p>
           <a:p xmlns:a="http://schemas.openxmlformats.org/drawingml/2006/main">
@@ -606,7 +611,7 @@
           <a:lstStyle xmlns:a="http://schemas.openxmlformats.org/drawingml/2006/main"/>
           <a:p xmlns:a="http://schemas.openxmlformats.org/drawingml/2006/main">
             <a:r>
-              <a:t>威胁不能只写‘可能存在偏差’，必须指明具体来源和可能改变哪个判断。本课不强制四类齐全，但至少写两类与项目相关的具体威胁。</a:t>
+              <a:t>贯穿案例中的 n=20、CS 单一与 A2 均为虚构教学示例，不构成实证结论。威胁不能只写‘可能存在偏差’，必须指明具体来源和可能改变哪个判断。本课不强制四类齐全，但至少写两类与项目相关的具体威胁。</a:t>
             </a:r>
           </a:p>
           <a:p xmlns:a="http://schemas.openxmlformats.org/drawingml/2006/main">
@@ -617,6 +622,11 @@
           <a:p xmlns:a="http://schemas.openxmlformats.org/drawingml/2006/main">
             <a:r>
               <a:t>[Sources]</a:t>
+            </a:r>
+          </a:p>
+          <a:p xmlns:a="http://schemas.openxmlformats.org/drawingml/2006/main">
+            <a:r>
+              <a:t>- Teaching artifact; sample size, domain, and hypothesis identifiers are fictional.</a:t>
             </a:r>
           </a:p>
           <a:p xmlns:a="http://schemas.openxmlformats.org/drawingml/2006/main">
@@ -901,7 +911,7 @@
           <a:lstStyle xmlns:a="http://schemas.openxmlformats.org/drawingml/2006/main"/>
           <a:p xmlns:a="http://schemas.openxmlformats.org/drawingml/2006/main">
             <a:r>
-              <a:t>让学生写一条失败日志和一条人工审核记录。审核理由不能写‘感觉不对’；必须指出数据来源、代码、实验建议或结论的具体问题。</a:t>
+              <a:t>课程虚构教学案例：exp-007 是课堂构造运行 ID。让学生在自己项目中写一条真实失败日志和一条人工审核记录；审核理由必须指出具体问题。</a:t>
             </a:r>
           </a:p>
           <a:p xmlns:a="http://schemas.openxmlformats.org/drawingml/2006/main">
@@ -912,6 +922,11 @@
           <a:p xmlns:a="http://schemas.openxmlformats.org/drawingml/2006/main">
             <a:r>
               <a:t>[Sources]</a:t>
+            </a:r>
+          </a:p>
+          <a:p xmlns:a="http://schemas.openxmlformats.org/drawingml/2006/main">
+            <a:r>
+              <a:t>- Teaching artifact; exp-007 is a fictional run identifier.</a:t>
             </a:r>
           </a:p>
           <a:p xmlns:a="http://schemas.openxmlformats.org/drawingml/2006/main">
@@ -1906,7 +1921,7 @@
           <a:lstStyle xmlns:a="http://schemas.openxmlformats.org/drawingml/2006/main"/>
           <a:p xmlns:a="http://schemas.openxmlformats.org/drawingml/2006/main">
             <a:r>
-              <a:t>逐项对照四项必备。Bouthillier 等强调 benchmark 比较中的方差；本课把这一要求落到多次运行与不确定性报告。只跑一次必须说明原因并降级为待验证。</a:t>
+              <a:t>课程虚构教学案例：20 篇、rubric v1.2、kappa 阈值和三个种子都不是真实结果。Bouthillier 等强调随机性 ML benchmark 比较中的方差；多种子只是该类项目的相称设计，不是全项目统一门槛。</a:t>
             </a:r>
           </a:p>
           <a:p xmlns:a="http://schemas.openxmlformats.org/drawingml/2006/main">
@@ -1917,6 +1932,11 @@
           <a:p xmlns:a="http://schemas.openxmlformats.org/drawingml/2006/main">
             <a:r>
               <a:t>[Sources]</a:t>
+            </a:r>
+          </a:p>
+          <a:p xmlns:a="http://schemas.openxmlformats.org/drawingml/2006/main">
+            <a:r>
+              <a:t>- Teaching artifact; all sample counts, rubric identifiers, thresholds and seeds are fictional.</a:t>
             </a:r>
           </a:p>
           <a:p xmlns:a="http://schemas.openxmlformats.org/drawingml/2006/main">
@@ -2277,7 +2297,7 @@
           <p:nvPr/>
         </p:nvPicPr>
         <p:blipFill>
-          <a:blip xmlns:r="http://schemas.openxmlformats.org/officeDocument/2006/relationships" xmlns:a="http://schemas.openxmlformats.org/drawingml/2006/main" r:embed="R7423c0d940a347f7">
+          <a:blip xmlns:r="http://schemas.openxmlformats.org/officeDocument/2006/relationships" xmlns:a="http://schemas.openxmlformats.org/drawingml/2006/main" r:embed="Refbdd9a82ae145ab">
             <a:duotone>
               <a:prstClr val="black"/>
               <a:schemeClr val="accent1">
@@ -2455,7 +2475,7 @@
           <p:nvPr/>
         </p:nvPicPr>
         <p:blipFill rotWithShape="1">
-          <a:blip xmlns:r="http://schemas.openxmlformats.org/officeDocument/2006/relationships" xmlns:a="http://schemas.openxmlformats.org/drawingml/2006/main" r:embed="R238f291a2fdd43db"/>
+          <a:blip xmlns:r="http://schemas.openxmlformats.org/officeDocument/2006/relationships" xmlns:a="http://schemas.openxmlformats.org/drawingml/2006/main" r:embed="R31dd5c870d7f4671"/>
           <a:srcRect xmlns:a="http://schemas.openxmlformats.org/drawingml/2006/main" l="74359" t="0" r="1346" b="0"/>
           <a:stretch xmlns:a="http://schemas.openxmlformats.org/drawingml/2006/main"/>
         </p:blipFill>
@@ -2478,7 +2498,7 @@
           <p:nvPr/>
         </p:nvPicPr>
         <p:blipFill rotWithShape="1">
-          <a:blip xmlns:r="http://schemas.openxmlformats.org/officeDocument/2006/relationships" xmlns:a="http://schemas.openxmlformats.org/drawingml/2006/main" r:embed="Rd92e96096c2047e5">
+          <a:blip xmlns:r="http://schemas.openxmlformats.org/officeDocument/2006/relationships" xmlns:a="http://schemas.openxmlformats.org/drawingml/2006/main" r:embed="R0d0c645a120a4e7b">
             <a:alphaModFix amt="35000"/>
           </a:blip>
           <a:srcRect xmlns:a="http://schemas.openxmlformats.org/drawingml/2006/main" l="0" t="9831" r="0" b="36385"/>
@@ -2740,7 +2760,7 @@
           <p:nvPr/>
         </p:nvPicPr>
         <p:blipFill>
-          <a:blip xmlns:r="http://schemas.openxmlformats.org/officeDocument/2006/relationships" xmlns:a="http://schemas.openxmlformats.org/drawingml/2006/main" r:embed="R3568dbb8b55e4fcd"/>
+          <a:blip xmlns:r="http://schemas.openxmlformats.org/officeDocument/2006/relationships" xmlns:a="http://schemas.openxmlformats.org/drawingml/2006/main" r:embed="Rad7bc01a86ab4c67"/>
           <a:srcRect xmlns:a="http://schemas.openxmlformats.org/drawingml/2006/main" l="0" t="0" r="54251" b="0"/>
           <a:stretch xmlns:a="http://schemas.openxmlformats.org/drawingml/2006/main"/>
         </p:blipFill>
@@ -2997,7 +3017,7 @@
           <p:nvPr/>
         </p:nvPicPr>
         <p:blipFill rotWithShape="1">
-          <a:blip xmlns:r="http://schemas.openxmlformats.org/officeDocument/2006/relationships" xmlns:a="http://schemas.openxmlformats.org/drawingml/2006/main" r:embed="R03dd17f489594f20"/>
+          <a:blip xmlns:r="http://schemas.openxmlformats.org/officeDocument/2006/relationships" xmlns:a="http://schemas.openxmlformats.org/drawingml/2006/main" r:embed="R32683d6bb6ca4a1c"/>
           <a:srcRect xmlns:a="http://schemas.openxmlformats.org/drawingml/2006/main" l="0" t="0" r="1346" b="0"/>
           <a:stretch xmlns:a="http://schemas.openxmlformats.org/drawingml/2006/main"/>
         </p:blipFill>
@@ -3180,7 +3200,7 @@
           <p:nvPr/>
         </p:nvPicPr>
         <p:blipFill>
-          <a:blip xmlns:r="http://schemas.openxmlformats.org/officeDocument/2006/relationships" xmlns:a="http://schemas.openxmlformats.org/drawingml/2006/main" r:embed="Re0e722c6a2214c6e"/>
+          <a:blip xmlns:r="http://schemas.openxmlformats.org/officeDocument/2006/relationships" xmlns:a="http://schemas.openxmlformats.org/drawingml/2006/main" r:embed="Rb36ab16730104d9a"/>
           <a:stretch xmlns:a="http://schemas.openxmlformats.org/drawingml/2006/main">
             <a:fillRect l="0" t="0" r="0" b="0"/>
           </a:stretch>
@@ -3276,7 +3296,7 @@
           <p:nvPr/>
         </p:nvPicPr>
         <p:blipFill>
-          <a:blip xmlns:r="http://schemas.openxmlformats.org/officeDocument/2006/relationships" xmlns:a="http://schemas.openxmlformats.org/drawingml/2006/main" r:embed="R1ed9a13140a9489a">
+          <a:blip xmlns:r="http://schemas.openxmlformats.org/officeDocument/2006/relationships" xmlns:a="http://schemas.openxmlformats.org/drawingml/2006/main" r:embed="Rfbe0bab8cc2d4cc2">
             <a:duotone>
               <a:prstClr val="black"/>
               <a:schemeClr val="accent1">
@@ -3443,7 +3463,7 @@
           <p:nvPr/>
         </p:nvPicPr>
         <p:blipFill rotWithShape="1">
-          <a:blip xmlns:r="http://schemas.openxmlformats.org/officeDocument/2006/relationships" xmlns:a="http://schemas.openxmlformats.org/drawingml/2006/main" r:embed="Rd547ed1a9dbd438b">
+          <a:blip xmlns:r="http://schemas.openxmlformats.org/officeDocument/2006/relationships" xmlns:a="http://schemas.openxmlformats.org/drawingml/2006/main" r:embed="R6503e1f95af34d77">
             <a:alphaModFix amt="20000"/>
             <a:duotone>
               <a:schemeClr val="accent4">
@@ -3541,10 +3561,10 @@
   </p:cSld>
   <p:clrMap bg1="lt1" tx1="dk1" bg2="lt2" tx2="dk2" accent1="accent1" accent2="accent2" accent3="accent3" accent4="accent4" accent5="accent5" accent6="accent6" hlink="hlink" folHlink="folHlink"/>
   <p:sldLayoutIdLst>
-    <p:sldLayoutId xmlns:r="http://schemas.openxmlformats.org/officeDocument/2006/relationships" id="2147483649" r:id="Rd1d6c211154f4bd0"/>
-    <p:sldLayoutId xmlns:r="http://schemas.openxmlformats.org/officeDocument/2006/relationships" id="2147483650" r:id="Re217cb2e2cff49ee"/>
-    <p:sldLayoutId xmlns:r="http://schemas.openxmlformats.org/officeDocument/2006/relationships" id="2147483651" r:id="R0fea7925cabc421e"/>
-    <p:sldLayoutId xmlns:r="http://schemas.openxmlformats.org/officeDocument/2006/relationships" id="2147483652" r:id="R16c817e8c58d4a55"/>
+    <p:sldLayoutId xmlns:r="http://schemas.openxmlformats.org/officeDocument/2006/relationships" id="2147483649" r:id="R9e25f31a208a4d30"/>
+    <p:sldLayoutId xmlns:r="http://schemas.openxmlformats.org/officeDocument/2006/relationships" id="2147483650" r:id="Rd3bebce979ae42a6"/>
+    <p:sldLayoutId xmlns:r="http://schemas.openxmlformats.org/officeDocument/2006/relationships" id="2147483651" r:id="Ra6ea2c22b33f4415"/>
+    <p:sldLayoutId xmlns:r="http://schemas.openxmlformats.org/officeDocument/2006/relationships" id="2147483652" r:id="Rc054456658b3423e"/>
   </p:sldLayoutIdLst>
   <p:hf hdr="0" ftr="0" dt="0"/>
   <p:txStyles>
@@ -5519,6 +5539,62 @@
           </a:p>
         </p:txBody>
       </p:sp>
+      <p:sp>
+        <p:nvSpPr>
+          <p:cNvPr id="27" name="fiction-label-10">
+            <a:extLst xmlns:a="http://schemas.openxmlformats.org/drawingml/2006/main">
+              <a:ext uri="{FF2B5EF4-FFF2-40B4-BE49-F238E27FC236}">
+                <a16:creationId xmlns:a16="http://schemas.microsoft.com/office/drawing/2014/main" id="{E632215B-5BA7-4D61-8C07-165A6DD84095}"/>
+              </a:ext>
+            </a:extLst>
+          </p:cNvPr>
+          <p:cNvSpPr>
+            <a:spLocks xmlns:a="http://schemas.openxmlformats.org/drawingml/2006/main" noGrp="1"/>
+          </p:cNvSpPr>
+          <p:nvPr/>
+        </p:nvSpPr>
+        <p:spPr>
+          <a:xfrm xmlns:a="http://schemas.openxmlformats.org/drawingml/2006/main">
+            <a:off x="7239000" y="742950"/>
+            <a:ext cx="4305300" cy="419100"/>
+          </a:xfrm>
+          <a:prstGeom xmlns:a="http://schemas.openxmlformats.org/drawingml/2006/main" prst="roundRect">
+            <a:avLst>
+              <a:gd name="adj" fmla="val 18182"/>
+            </a:avLst>
+          </a:prstGeom>
+          <a:solidFill xmlns:a="http://schemas.openxmlformats.org/drawingml/2006/main">
+            <a:srgbClr val="F8E9EA"/>
+          </a:solidFill>
+          <a:ln xmlns:a="http://schemas.openxmlformats.org/drawingml/2006/main" w="9525">
+            <a:solidFill>
+              <a:srgbClr val="C8161E"/>
+            </a:solidFill>
+            <a:prstDash val="solid"/>
+          </a:ln>
+        </p:spPr>
+        <p:txBody>
+          <a:bodyPr xmlns:a="http://schemas.openxmlformats.org/drawingml/2006/main" lIns="57150" tIns="19050" rIns="57150" bIns="19050" anchor="ctr"/>
+          <a:lstStyle xmlns:a="http://schemas.openxmlformats.org/drawingml/2006/main"/>
+          <a:p xmlns:a="http://schemas.openxmlformats.org/drawingml/2006/main">
+            <a:pPr algn="ctr">
+              <a:defRPr sz="1800" b="1">
+                <a:solidFill>
+                  <a:srgbClr val="C8161E"/>
+                </a:solidFill>
+              </a:defRPr>
+            </a:pPr>
+            <a:r>
+              <a:rPr sz="1800" b="1">
+                <a:solidFill>
+                  <a:srgbClr val="C8161E"/>
+                </a:solidFill>
+              </a:rPr>
+              <a:t>课程虚构假设 / ID｜非实验</a:t>
+            </a:r>
+          </a:p>
+        </p:txBody>
+      </p:sp>
     </p:spTree>
     <p:extLst>
       <p:ext uri="{BB962C8B-B14F-4D97-AF65-F5344CB8AC3E}">
@@ -5654,7 +5730,7 @@
               </a:defRPr>
             </a:pPr>
             <a:r>
-              <a:rPr sz="1125" b="1">
+              <a:rPr sz="1800" b="1">
                 <a:solidFill>
                   <a:srgbClr val="C8161E"/>
                 </a:solidFill>
@@ -11366,6 +11442,62 @@
           </a:p>
         </p:txBody>
       </p:sp>
+      <p:sp>
+        <p:nvSpPr>
+          <p:cNvPr id="27" name="fiction-label-14">
+            <a:extLst xmlns:a="http://schemas.openxmlformats.org/drawingml/2006/main">
+              <a:ext uri="{FF2B5EF4-FFF2-40B4-BE49-F238E27FC236}">
+                <a16:creationId xmlns:a16="http://schemas.microsoft.com/office/drawing/2014/main" id="{B24C828B-2B97-4612-8881-53330B21947C}"/>
+              </a:ext>
+            </a:extLst>
+          </p:cNvPr>
+          <p:cNvSpPr>
+            <a:spLocks xmlns:a="http://schemas.openxmlformats.org/drawingml/2006/main" noGrp="1"/>
+          </p:cNvSpPr>
+          <p:nvPr/>
+        </p:nvSpPr>
+        <p:spPr>
+          <a:xfrm xmlns:a="http://schemas.openxmlformats.org/drawingml/2006/main">
+            <a:off x="7239000" y="742950"/>
+            <a:ext cx="4305300" cy="419100"/>
+          </a:xfrm>
+          <a:prstGeom xmlns:a="http://schemas.openxmlformats.org/drawingml/2006/main" prst="roundRect">
+            <a:avLst>
+              <a:gd name="adj" fmla="val 18182"/>
+            </a:avLst>
+          </a:prstGeom>
+          <a:solidFill xmlns:a="http://schemas.openxmlformats.org/drawingml/2006/main">
+            <a:srgbClr val="F8E9EA"/>
+          </a:solidFill>
+          <a:ln xmlns:a="http://schemas.openxmlformats.org/drawingml/2006/main" w="9525">
+            <a:solidFill>
+              <a:srgbClr val="C8161E"/>
+            </a:solidFill>
+            <a:prstDash val="solid"/>
+          </a:ln>
+        </p:spPr>
+        <p:txBody>
+          <a:bodyPr xmlns:a="http://schemas.openxmlformats.org/drawingml/2006/main" lIns="57150" tIns="19050" rIns="57150" bIns="19050" anchor="ctr"/>
+          <a:lstStyle xmlns:a="http://schemas.openxmlformats.org/drawingml/2006/main"/>
+          <a:p xmlns:a="http://schemas.openxmlformats.org/drawingml/2006/main">
+            <a:pPr algn="ctr">
+              <a:defRPr sz="1800" b="1">
+                <a:solidFill>
+                  <a:srgbClr val="C8161E"/>
+                </a:solidFill>
+              </a:defRPr>
+            </a:pPr>
+            <a:r>
+              <a:rPr sz="1800" b="1">
+                <a:solidFill>
+                  <a:srgbClr val="C8161E"/>
+                </a:solidFill>
+              </a:rPr>
+              <a:t>课程虚构运行 ID｜非真实日志</a:t>
+            </a:r>
+          </a:p>
+        </p:txBody>
+      </p:sp>
     </p:spTree>
     <p:extLst>
       <p:ext uri="{BB962C8B-B14F-4D97-AF65-F5344CB8AC3E}">
@@ -11559,7 +11691,7 @@
               </a:defRPr>
             </a:pPr>
             <a:r>
-              <a:rPr sz="1500" b="1">
+              <a:rPr sz="1800" b="1">
                 <a:solidFill>
                   <a:srgbClr val="FFFFFF"/>
                 </a:solidFill>
@@ -11615,7 +11747,7 @@
               </a:defRPr>
             </a:pPr>
             <a:r>
-              <a:rPr sz="1350" b="1">
+              <a:rPr sz="1800" b="1">
                 <a:solidFill>
                   <a:srgbClr val="263746"/>
                 </a:solidFill>
@@ -11623,7 +11755,7 @@
                 <a:ea typeface="Microsoft YaHei"/>
                 <a:cs typeface="Microsoft YaHei"/>
               </a:rPr>
-              <a:t>明确动作；输入/输出/成功/不适用</a:t>
+              <a:t>动作契约｜四字段</a:t>
             </a:r>
           </a:p>
         </p:txBody>
@@ -11673,7 +11805,7 @@
               </a:defRPr>
             </a:pPr>
             <a:r>
-              <a:rPr sz="1500" b="1">
+              <a:rPr sz="1800" b="1">
                 <a:solidFill>
                   <a:srgbClr val="FFFFFF"/>
                 </a:solidFill>
@@ -11729,7 +11861,7 @@
               </a:defRPr>
             </a:pPr>
             <a:r>
-              <a:rPr sz="1350" b="1">
+              <a:rPr sz="1800" b="1">
                 <a:solidFill>
                   <a:srgbClr val="263746"/>
                 </a:solidFill>
@@ -11737,7 +11869,7 @@
                 <a:ea typeface="Microsoft YaHei"/>
                 <a:cs typeface="Microsoft YaHei"/>
               </a:rPr>
-              <a:t>有可运行或可演示原型</a:t>
+              <a:t>可运行 / 可演示原型</a:t>
             </a:r>
           </a:p>
         </p:txBody>
@@ -11787,7 +11919,7 @@
               </a:defRPr>
             </a:pPr>
             <a:r>
-              <a:rPr sz="1500" b="1">
+              <a:rPr sz="1800" b="1">
                 <a:solidFill>
                   <a:srgbClr val="FFFFFF"/>
                 </a:solidFill>
@@ -11843,7 +11975,7 @@
               </a:defRPr>
             </a:pPr>
             <a:r>
-              <a:rPr sz="1350" b="1">
+              <a:rPr sz="1800" b="1">
                 <a:solidFill>
                   <a:srgbClr val="263746"/>
                 </a:solidFill>
@@ -11851,7 +11983,7 @@
                 <a:ea typeface="Microsoft YaHei"/>
                 <a:cs typeface="Microsoft YaHei"/>
               </a:rPr>
-              <a:t>Context/Memory/工件/工具/数据</a:t>
+              <a:t>Context / Memory / 工件</a:t>
             </a:r>
           </a:p>
         </p:txBody>
@@ -11901,7 +12033,7 @@
               </a:defRPr>
             </a:pPr>
             <a:r>
-              <a:rPr sz="1500" b="1">
+              <a:rPr sz="1800" b="1">
                 <a:solidFill>
                   <a:srgbClr val="FFFFFF"/>
                 </a:solidFill>
@@ -11957,7 +12089,7 @@
               </a:defRPr>
             </a:pPr>
             <a:r>
-              <a:rPr sz="1350" b="1">
+              <a:rPr sz="1800" b="1">
                 <a:solidFill>
                   <a:srgbClr val="263746"/>
                 </a:solidFill>
@@ -11965,7 +12097,7 @@
                 <a:ea typeface="Microsoft YaHei"/>
                 <a:cs typeface="Microsoft YaHei"/>
               </a:rPr>
-              <a:t>权限/禁止/预算/停止/人工确认</a:t>
+              <a:t>权限 / 预算 / 停止 / 确认</a:t>
             </a:r>
           </a:p>
         </p:txBody>
@@ -12015,7 +12147,7 @@
               </a:defRPr>
             </a:pPr>
             <a:r>
-              <a:rPr sz="1500" b="1">
+              <a:rPr sz="1800" b="1">
                 <a:solidFill>
                   <a:srgbClr val="FFFFFF"/>
                 </a:solidFill>
@@ -12071,7 +12203,7 @@
               </a:defRPr>
             </a:pPr>
             <a:r>
-              <a:rPr sz="1350" b="1">
+              <a:rPr sz="1800" b="1">
                 <a:solidFill>
                   <a:srgbClr val="263746"/>
                 </a:solidFill>
@@ -12079,7 +12211,7 @@
                 <a:ea typeface="Microsoft YaHei"/>
                 <a:cs typeface="Microsoft YaHei"/>
               </a:rPr>
-              <a:t>至少一次可重复评价 + 对照</a:t>
+              <a:t>可重复评价 + 对照</a:t>
             </a:r>
           </a:p>
         </p:txBody>
@@ -12129,7 +12261,7 @@
               </a:defRPr>
             </a:pPr>
             <a:r>
-              <a:rPr sz="1500" b="1">
+              <a:rPr sz="1800" b="1">
                 <a:solidFill>
                   <a:srgbClr val="FFFFFF"/>
                 </a:solidFill>
@@ -12185,7 +12317,7 @@
               </a:defRPr>
             </a:pPr>
             <a:r>
-              <a:rPr sz="1350" b="1">
+              <a:rPr sz="1800" b="1">
                 <a:solidFill>
                   <a:srgbClr val="263746"/>
                 </a:solidFill>
@@ -12193,7 +12325,7 @@
                 <a:ea typeface="Microsoft YaHei"/>
                 <a:cs typeface="Microsoft YaHei"/>
               </a:rPr>
-              <a:t>保留失败/无效建议/局限</a:t>
+              <a:t>失败 / 无效 / 局限保留</a:t>
             </a:r>
           </a:p>
         </p:txBody>
@@ -12243,7 +12375,7 @@
               </a:defRPr>
             </a:pPr>
             <a:r>
-              <a:rPr sz="1500" b="1">
+              <a:rPr sz="1800" b="1">
                 <a:solidFill>
                   <a:srgbClr val="FFFFFF"/>
                 </a:solidFill>
@@ -12299,7 +12431,7 @@
               </a:defRPr>
             </a:pPr>
             <a:r>
-              <a:rPr sz="1350" b="1">
+              <a:rPr sz="1800" b="1">
                 <a:solidFill>
                   <a:srgbClr val="263746"/>
                 </a:solidFill>
@@ -12307,7 +12439,7 @@
                 <a:ea typeface="Microsoft YaHei"/>
                 <a:cs typeface="Microsoft YaHei"/>
               </a:rPr>
-              <a:t>AI 代码/建议/结论有人工审核</a:t>
+              <a:t>AI 输出有人工审核</a:t>
             </a:r>
           </a:p>
         </p:txBody>
@@ -12357,7 +12489,7 @@
               </a:defRPr>
             </a:pPr>
             <a:r>
-              <a:rPr sz="1500" b="1">
+              <a:rPr sz="1800" b="1">
                 <a:solidFill>
                   <a:srgbClr val="FFFFFF"/>
                 </a:solidFill>
@@ -12413,7 +12545,7 @@
               </a:defRPr>
             </a:pPr>
             <a:r>
-              <a:rPr sz="1350" b="1">
+              <a:rPr sz="1800" b="1">
                 <a:solidFill>
                   <a:srgbClr val="263746"/>
                 </a:solidFill>
@@ -12421,7 +12553,7 @@
                 <a:ea typeface="Microsoft YaHei"/>
                 <a:cs typeface="Microsoft YaHei"/>
               </a:rPr>
-              <a:t>评价说明实际影响，不列功能</a:t>
+              <a:t>报告实际影响</a:t>
             </a:r>
           </a:p>
         </p:txBody>
@@ -12471,7 +12603,7 @@
               </a:defRPr>
             </a:pPr>
             <a:r>
-              <a:rPr sz="1500" b="1">
+              <a:rPr sz="1800" b="1">
                 <a:solidFill>
                   <a:srgbClr val="FFFFFF"/>
                 </a:solidFill>
@@ -12527,7 +12659,7 @@
               </a:defRPr>
             </a:pPr>
             <a:r>
-              <a:rPr sz="1350" b="1">
+              <a:rPr sz="1800" b="1">
                 <a:solidFill>
                   <a:srgbClr val="263746"/>
                 </a:solidFill>
@@ -12535,7 +12667,7 @@
                 <a:ea typeface="Microsoft YaHei"/>
                 <a:cs typeface="Microsoft YaHei"/>
               </a:rPr>
-              <a:t>证据/强度/冲突/缺失/风险</a:t>
+              <a:t>强度 / 冲突 / 缺失</a:t>
             </a:r>
           </a:p>
         </p:txBody>
@@ -12557,7 +12689,7 @@
         <p:spPr>
           <a:xfrm xmlns:a="http://schemas.openxmlformats.org/drawingml/2006/main">
             <a:off x="4000500" y="4229100"/>
-            <a:ext cx="400050" cy="400050"/>
+            <a:ext cx="571500" cy="400050"/>
           </a:xfrm>
           <a:prstGeom xmlns:a="http://schemas.openxmlformats.org/drawingml/2006/main" prst="roundRect">
             <a:avLst>
@@ -12585,7 +12717,7 @@
               </a:defRPr>
             </a:pPr>
             <a:r>
-              <a:rPr sz="1500" b="1">
+              <a:rPr sz="1800" b="1">
                 <a:solidFill>
                   <a:srgbClr val="FFFFFF"/>
                 </a:solidFill>
@@ -12593,7 +12725,7 @@
                 <a:ea typeface="Microsoft YaHei"/>
                 <a:cs typeface="Microsoft YaHei"/>
               </a:rPr>
-              <a:t>⑩</a:t>
+              <a:t>10</a:t>
             </a:r>
           </a:p>
         </p:txBody>
@@ -12614,8 +12746,8 @@
         </p:nvSpPr>
         <p:spPr>
           <a:xfrm xmlns:a="http://schemas.openxmlformats.org/drawingml/2006/main">
-            <a:off x="4476750" y="4229100"/>
-            <a:ext cx="2647950" cy="400050"/>
+            <a:off x="4648200" y="4229100"/>
+            <a:ext cx="2476500" cy="400050"/>
           </a:xfrm>
           <a:prstGeom xmlns:a="http://schemas.openxmlformats.org/drawingml/2006/main" prst="rect">
             <a:avLst/>
@@ -12641,7 +12773,7 @@
               </a:defRPr>
             </a:pPr>
             <a:r>
-              <a:rPr sz="1350" b="1">
+              <a:rPr sz="1800" b="1">
                 <a:solidFill>
                   <a:srgbClr val="263746"/>
                 </a:solidFill>
@@ -12649,7 +12781,7 @@
                 <a:ea typeface="Microsoft YaHei"/>
                 <a:cs typeface="Microsoft YaHei"/>
               </a:rPr>
-              <a:t>伦理更新：数据/权限/外部服务</a:t>
+              <a:t>伦理三项更新</a:t>
             </a:r>
           </a:p>
         </p:txBody>
@@ -13498,7 +13630,7 @@
               </a:defRPr>
             </a:pPr>
             <a:r>
-              <a:rPr sz="1125" b="1">
+              <a:rPr sz="1800" b="1">
                 <a:solidFill>
                   <a:srgbClr val="C8161E"/>
                 </a:solidFill>
@@ -16456,7 +16588,7 @@
                 <a:ea typeface="Microsoft YaHei"/>
                 <a:cs typeface="Microsoft YaHei"/>
               </a:rPr>
-              <a:t>有 baseline、固定协议和 ≥3 次运行吗？</a:t>
+              <a:t>有 baseline/对照或等价依据？重复设计相称吗？</a:t>
             </a:r>
           </a:p>
         </p:txBody>
@@ -17168,7 +17300,7 @@
                 <a:ea typeface="Microsoft YaHei"/>
                 <a:cs typeface="Microsoft YaHei"/>
               </a:rPr>
-              <a:t>评价有 baseline 和可重复协议吗？</a:t>
+              <a:t>评价有 baseline/对照或等价依据吗？</a:t>
             </a:r>
           </a:p>
         </p:txBody>
@@ -21199,6 +21331,62 @@
           </a:p>
         </p:txBody>
       </p:sp>
+      <p:sp>
+        <p:nvSpPr>
+          <p:cNvPr id="23" name="fiction-label-4">
+            <a:extLst xmlns:a="http://schemas.openxmlformats.org/drawingml/2006/main">
+              <a:ext uri="{FF2B5EF4-FFF2-40B4-BE49-F238E27FC236}">
+                <a16:creationId xmlns:a16="http://schemas.microsoft.com/office/drawing/2014/main" id="{57E7CD6B-F3A1-4380-B040-BF76743BAA7B}"/>
+              </a:ext>
+            </a:extLst>
+          </p:cNvPr>
+          <p:cNvSpPr>
+            <a:spLocks xmlns:a="http://schemas.openxmlformats.org/drawingml/2006/main" noGrp="1"/>
+          </p:cNvSpPr>
+          <p:nvPr/>
+        </p:nvSpPr>
+        <p:spPr>
+          <a:xfrm xmlns:a="http://schemas.openxmlformats.org/drawingml/2006/main">
+            <a:off x="7239000" y="742950"/>
+            <a:ext cx="4305300" cy="419100"/>
+          </a:xfrm>
+          <a:prstGeom xmlns:a="http://schemas.openxmlformats.org/drawingml/2006/main" prst="roundRect">
+            <a:avLst>
+              <a:gd name="adj" fmla="val 18182"/>
+            </a:avLst>
+          </a:prstGeom>
+          <a:solidFill xmlns:a="http://schemas.openxmlformats.org/drawingml/2006/main">
+            <a:srgbClr val="F8E9EA"/>
+          </a:solidFill>
+          <a:ln xmlns:a="http://schemas.openxmlformats.org/drawingml/2006/main" w="9525">
+            <a:solidFill>
+              <a:srgbClr val="C8161E"/>
+            </a:solidFill>
+            <a:prstDash val="solid"/>
+          </a:ln>
+        </p:spPr>
+        <p:txBody>
+          <a:bodyPr xmlns:a="http://schemas.openxmlformats.org/drawingml/2006/main" lIns="57150" tIns="19050" rIns="57150" bIns="19050" anchor="ctr"/>
+          <a:lstStyle xmlns:a="http://schemas.openxmlformats.org/drawingml/2006/main"/>
+          <a:p xmlns:a="http://schemas.openxmlformats.org/drawingml/2006/main">
+            <a:pPr algn="ctr">
+              <a:defRPr sz="1800" b="1">
+                <a:solidFill>
+                  <a:srgbClr val="C8161E"/>
+                </a:solidFill>
+              </a:defRPr>
+            </a:pPr>
+            <a:r>
+              <a:rPr sz="1800" b="1">
+                <a:solidFill>
+                  <a:srgbClr val="C8161E"/>
+                </a:solidFill>
+              </a:rPr>
+              <a:t>课程虚构数值｜非实证结果</a:t>
+            </a:r>
+          </a:p>
+        </p:txBody>
+      </p:sp>
     </p:spTree>
     <p:extLst>
       <p:ext uri="{BB962C8B-B14F-4D97-AF65-F5344CB8AC3E}">
@@ -22340,7 +22528,7 @@
                 <a:ea typeface="Microsoft YaHei"/>
                 <a:cs typeface="Microsoft YaHei"/>
               </a:rPr>
-              <a:t>重复与方差</a:t>
+              <a:t>相称评价</a:t>
             </a:r>
           </a:p>
         </p:txBody>
@@ -22401,7 +22589,7 @@
                 <a:ea typeface="Microsoft YaHei"/>
                 <a:cs typeface="Microsoft YaHei"/>
               </a:rPr>
-              <a:t>≥3 次种子｜均值 + 标准差</a:t>
+              <a:t>多种子 / 独立标注 / 等价依据</a:t>
             </a:r>
           </a:p>
         </p:txBody>
@@ -23194,6 +23382,62 @@
                 <a:cs typeface="Microsoft YaHei"/>
               </a:rPr>
               <a:t>单次分数不能直接写成稳定结论；先报告不确定性。</a:t>
+            </a:r>
+          </a:p>
+        </p:txBody>
+      </p:sp>
+      <p:sp>
+        <p:nvSpPr>
+          <p:cNvPr id="28" name="fiction-label-6">
+            <a:extLst xmlns:a="http://schemas.openxmlformats.org/drawingml/2006/main">
+              <a:ext uri="{FF2B5EF4-FFF2-40B4-BE49-F238E27FC236}">
+                <a16:creationId xmlns:a16="http://schemas.microsoft.com/office/drawing/2014/main" id="{A3061C3A-5547-4A3F-BD9A-6BB168CD6FE8}"/>
+              </a:ext>
+            </a:extLst>
+          </p:cNvPr>
+          <p:cNvSpPr>
+            <a:spLocks xmlns:a="http://schemas.openxmlformats.org/drawingml/2006/main" noGrp="1"/>
+          </p:cNvSpPr>
+          <p:nvPr/>
+        </p:nvSpPr>
+        <p:spPr>
+          <a:xfrm xmlns:a="http://schemas.openxmlformats.org/drawingml/2006/main">
+            <a:off x="7239000" y="742950"/>
+            <a:ext cx="4305300" cy="419100"/>
+          </a:xfrm>
+          <a:prstGeom xmlns:a="http://schemas.openxmlformats.org/drawingml/2006/main" prst="roundRect">
+            <a:avLst>
+              <a:gd name="adj" fmla="val 18182"/>
+            </a:avLst>
+          </a:prstGeom>
+          <a:solidFill xmlns:a="http://schemas.openxmlformats.org/drawingml/2006/main">
+            <a:srgbClr val="F8E9EA"/>
+          </a:solidFill>
+          <a:ln xmlns:a="http://schemas.openxmlformats.org/drawingml/2006/main" w="9525">
+            <a:solidFill>
+              <a:srgbClr val="C8161E"/>
+            </a:solidFill>
+            <a:prstDash val="solid"/>
+          </a:ln>
+        </p:spPr>
+        <p:txBody>
+          <a:bodyPr xmlns:a="http://schemas.openxmlformats.org/drawingml/2006/main" lIns="57150" tIns="19050" rIns="57150" bIns="19050" anchor="ctr"/>
+          <a:lstStyle xmlns:a="http://schemas.openxmlformats.org/drawingml/2006/main"/>
+          <a:p xmlns:a="http://schemas.openxmlformats.org/drawingml/2006/main">
+            <a:pPr algn="ctr">
+              <a:defRPr sz="1800" b="1">
+                <a:solidFill>
+                  <a:srgbClr val="C8161E"/>
+                </a:solidFill>
+              </a:defRPr>
+            </a:pPr>
+            <a:r>
+              <a:rPr sz="1800" b="1">
+                <a:solidFill>
+                  <a:srgbClr val="C8161E"/>
+                </a:solidFill>
+              </a:rPr>
+              <a:t>课程虚构集合 / ID｜非真实运行</a:t>
             </a:r>
           </a:p>
         </p:txBody>
@@ -25426,6 +25670,62 @@
                 <a:cs typeface="Microsoft YaHei"/>
               </a:rPr>
               <a:t>只有单一证据时：写强度、适用边界与缺失，不得标记 stable。</a:t>
+            </a:r>
+          </a:p>
+        </p:txBody>
+      </p:sp>
+      <p:sp>
+        <p:nvSpPr>
+          <p:cNvPr id="27" name="fiction-label-8">
+            <a:extLst xmlns:a="http://schemas.openxmlformats.org/drawingml/2006/main">
+              <a:ext uri="{FF2B5EF4-FFF2-40B4-BE49-F238E27FC236}">
+                <a16:creationId xmlns:a16="http://schemas.microsoft.com/office/drawing/2014/main" id="{723A9CCA-392A-4FCE-9451-2AD407CBAB4E}"/>
+              </a:ext>
+            </a:extLst>
+          </p:cNvPr>
+          <p:cNvSpPr>
+            <a:spLocks xmlns:a="http://schemas.openxmlformats.org/drawingml/2006/main" noGrp="1"/>
+          </p:cNvSpPr>
+          <p:nvPr/>
+        </p:nvSpPr>
+        <p:spPr>
+          <a:xfrm xmlns:a="http://schemas.openxmlformats.org/drawingml/2006/main">
+            <a:off x="7239000" y="742950"/>
+            <a:ext cx="4305300" cy="419100"/>
+          </a:xfrm>
+          <a:prstGeom xmlns:a="http://schemas.openxmlformats.org/drawingml/2006/main" prst="roundRect">
+            <a:avLst>
+              <a:gd name="adj" fmla="val 18182"/>
+            </a:avLst>
+          </a:prstGeom>
+          <a:solidFill xmlns:a="http://schemas.openxmlformats.org/drawingml/2006/main">
+            <a:srgbClr val="F8E9EA"/>
+          </a:solidFill>
+          <a:ln xmlns:a="http://schemas.openxmlformats.org/drawingml/2006/main" w="9525">
+            <a:solidFill>
+              <a:srgbClr val="C8161E"/>
+            </a:solidFill>
+            <a:prstDash val="solid"/>
+          </a:ln>
+        </p:spPr>
+        <p:txBody>
+          <a:bodyPr xmlns:a="http://schemas.openxmlformats.org/drawingml/2006/main" lIns="57150" tIns="19050" rIns="57150" bIns="19050" anchor="ctr"/>
+          <a:lstStyle xmlns:a="http://schemas.openxmlformats.org/drawingml/2006/main"/>
+          <a:p xmlns:a="http://schemas.openxmlformats.org/drawingml/2006/main">
+            <a:pPr algn="ctr">
+              <a:defRPr sz="1800" b="1">
+                <a:solidFill>
+                  <a:srgbClr val="C8161E"/>
+                </a:solidFill>
+              </a:defRPr>
+            </a:pPr>
+            <a:r>
+              <a:rPr sz="1800" b="1">
+                <a:solidFill>
+                  <a:srgbClr val="C8161E"/>
+                </a:solidFill>
+              </a:rPr>
+              <a:t>课程虚构数值｜非实证结果</a:t>
             </a:r>
           </a:p>
         </p:txBody>
